--- a/marketing/LeXWeftLite_テスト版のご案内.pptx
+++ b/marketing/LeXWeftLite_テスト版のご案内.pptx
@@ -116,25 +116,25 @@
   <p:extLst>
     <p:ext uri="{521415D9-36F7-43E2-AB2F-B90AF26B5E84}">
       <p14:sectionLst xmlns:p14="http://schemas.microsoft.com/office/powerpoint/2010/main">
-        <p14:section name="はじめに" id="{3b1ba0f2-eba7-a0ef-eac3-6595860e6b8c}">
+        <p14:section name="はじめに" id="{e7b84a32-1e90-160d-8b9b-d3031ab5381e}">
           <p14:sldIdLst>
             <p14:sldId id="256"/>
             <p14:sldId id="257"/>
           </p14:sldIdLst>
         </p14:section>
-        <p14:section name="見る" id="{f638efc8-34d4-aceb-9a21-d6adfa454541}">
+        <p14:section name="見る" id="{6af7d518-f7b5-e67b-5107-e2af868ec2e4}">
           <p14:sldIdLst>
             <p14:sldId id="258"/>
             <p14:sldId id="259"/>
             <p14:sldId id="260"/>
           </p14:sldIdLst>
         </p14:section>
-        <p14:section name="深める" id="{16f5070a-ba8f-7a65-bc46-8dce2756265a}">
+        <p14:section name="深める" id="{d5165079-ab69-3075-b91b-3134daaae01f}">
           <p14:sldIdLst>
             <p14:sldId id="261"/>
           </p14:sldIdLst>
         </p14:section>
-        <p14:section name="入れ方とお願い" id="{4b709b4d-426a-89b5-7698-6fe53d4ac3e7}">
+        <p14:section name="入れ方とお願い" id="{c1c9b269-772c-64e5-6a6a-78b1bed081db}">
           <p14:sldIdLst>
             <p14:sldId id="262"/>
             <p14:sldId id="263"/>
@@ -2516,7 +2516,7 @@
                             <a:srgbClr val="E6EEF0"/>
                           </a:solidFill>
                         </a:rPr>
-                        <a:t>Claude に lexweft-lite が出ない</a:t>
+                        <a:t>Claude に資料の件数を聞いても分からないと言われる</a:t>
                       </a:r>
                       <a:endParaRPr lang="en-US" sz="1600" dirty="0"/>
                     </a:p>
@@ -2574,7 +2574,7 @@
                             <a:srgbClr val="E6EEF0"/>
                           </a:solidFill>
                         </a:rPr>
-                        <a:t>Claude Desktop を完全に終了して開き直す。出なければセットアップをもう一度実行して最後に y</a:t>
+                        <a:t>Claude Desktop を完全に終了して（⌘Q）開き直す。だめならセットアップをもう一度実行して最後に y</a:t>
                       </a:r>
                       <a:endParaRPr lang="en-US" sz="1600" dirty="0"/>
                     </a:p>
@@ -4637,7 +4637,7 @@
                   <a:srgbClr val="1F2328"/>
                 </a:solidFill>
               </a:rPr>
-              <a:t>Claude Desktop を開き直す</a:t>
+              <a:t>Claude Desktop を開き直して確かめる</a:t>
             </a:r>
             <a:endParaRPr lang="en-US" sz="1800" dirty="0"/>
           </a:p>
@@ -4673,7 +4673,7 @@
                   <a:srgbClr val="4B5563"/>
                 </a:solidFill>
               </a:rPr>
-              <a:t>道具の一覧に lexweft-lite が出れば接続できている</a:t>
+              <a:t>「LeXWeft Lite に入っている資料は何件？」と聞き、件数が返ればつながっている</a:t>
             </a:r>
             <a:endParaRPr lang="en-US" sz="1400" dirty="0"/>
           </a:p>
